--- a/course/高校实验室安全/课件/050_化学品取用、转移与运输.pptx
+++ b/course/高校实验室安全/课件/050_化学品取用、转移与运输.pptx
@@ -524,7 +524,7 @@
           </a:p>
           <a:p>
             <a:r>
-              <a:t>取用前，对照实验记录或操作规程，逐字核对化学品安全标签上的名称、浓度、规格，并看清象形图和防范说明（GB 30000 系列、GB 15258-2009，以现行文本为准；标签识读见第 041 课）。</a:t>
+              <a:t>取用前，对照实验记录或操作规程，逐字核对化学品安全标签上的名称、浓度、规格，并看清象形图和防范说明（GB 30000 系列、GB 15258-2009，以现行文本为准；标签识读见第 039 课）。</a:t>
             </a:r>
           </a:p>
           <a:p>
